--- a/2026_Б_ККП_ПЗПІ-23-6_Бєлік_Є_В/2026_Б_ККП_ПЗПІ-23-6_Бєлік_Є_В.pptx
+++ b/2026_Б_ККП_ПЗПІ-23-6_Бєлік_Є_В/2026_Б_ККП_ПЗПІ-23-6_Бєлік_Є_В.pptx
@@ -297,8 +297,7 @@
 <file path=ppt/revisionInfo.xml><?xml version="1.0" encoding="utf-8"?>
 <p1510:revInfo xmlns:a="http://schemas.openxmlformats.org/drawingml/2006/main" xmlns:r="http://schemas.openxmlformats.org/officeDocument/2006/relationships" xmlns:p1510="http://schemas.microsoft.com/office/powerpoint/2015/10/main">
   <p1510:revLst>
-    <p1510:client id="{26302184-659D-23D2-2BD4-FD8C4FC17012}" v="233" dt="2026-06-07T18:31:08.420"/>
-    <p1510:client id="{54F03453-35EC-35A5-754C-0E980A821EDE}" v="101" dt="2026-06-07T20:05:33.128"/>
+    <p1510:client id="{05682F0D-02DD-723F-FD35-E36A0CD05176}" v="4" dt="2026-06-17T08:39:59.322"/>
   </p1510:revLst>
 </p1510:revInfo>
 </file>
@@ -9759,7 +9758,7 @@
         </p:nvSpPr>
         <p:spPr>
           <a:xfrm>
-            <a:off x="311700" y="1225225"/>
+            <a:off x="311700" y="897565"/>
             <a:ext cx="8520600" cy="3354000"/>
           </a:xfrm>
           <a:prstGeom prst="rect">
@@ -9772,40 +9771,20 @@
           </a:bodyPr>
           <a:lstStyle/>
           <a:p>
-            <a:pPr marL="0" lvl="0" indent="0">
+            <a:pPr marL="0" indent="0">
+              <a:lnSpc>
+                <a:spcPct val="114999"/>
+              </a:lnSpc>
               <a:spcBef>
                 <a:spcPts val="1200"/>
               </a:spcBef>
               <a:buNone/>
             </a:pPr>
             <a:r>
-              <a:rPr lang="uk-UA" dirty="0"/>
-              <a:t>Проєктування та реалізація </a:t>
-            </a:r>
-            <a:r>
-              <a:rPr lang="en-US" dirty="0"/>
-              <a:t>Android-</a:t>
-            </a:r>
-            <a:r>
-              <a:rPr lang="uk-UA" dirty="0"/>
-              <a:t>частини програмної системи </a:t>
-            </a:r>
-            <a:r>
-              <a:rPr lang="en-US" dirty="0"/>
-              <a:t>Eter </a:t>
-            </a:r>
-            <a:r>
-              <a:rPr lang="uk-UA" dirty="0"/>
-              <a:t>для публікації, прослуховування та взаємодії з </a:t>
-            </a:r>
-            <a:r>
-              <a:rPr lang="uk-UA" dirty="0" err="1"/>
-              <a:t>аудіопоезією</a:t>
-            </a:r>
-            <a:r>
-              <a:rPr lang="uk-UA" dirty="0"/>
-              <a:t>.</a:t>
-            </a:r>
+              <a:rPr lang="uk-UA"/>
+              <a:t>Розробка серверної частини системи Eter, що забезпечує обробку запитів користувачів, збереження даних, роботу з аудіопублікаціями та взаємодію між клієнтськими застосунками.</a:t>
+            </a:r>
+            <a:endParaRPr lang="en-US"/>
           </a:p>
           <a:p>
             <a:pPr marL="0" lvl="0" indent="0">
@@ -9817,35 +9796,20 @@
             <a:endParaRPr lang="uk-UA" dirty="0"/>
           </a:p>
           <a:p>
-            <a:pPr marL="0" lvl="0" indent="0">
+            <a:pPr marL="0" indent="0">
+              <a:lnSpc>
+                <a:spcPct val="114999"/>
+              </a:lnSpc>
               <a:spcBef>
                 <a:spcPts val="1200"/>
               </a:spcBef>
               <a:buNone/>
             </a:pPr>
             <a:r>
-              <a:rPr lang="uk-UA" dirty="0"/>
-              <a:t>Актуальність роботи полягає в тому, що </a:t>
-            </a:r>
-            <a:r>
-              <a:rPr lang="uk-UA" dirty="0" err="1"/>
-              <a:t>аудіопоезія</a:t>
-            </a:r>
-            <a:r>
-              <a:rPr lang="uk-UA" dirty="0"/>
-              <a:t> потребує спеціалізованого мобільного клієнта, який поєднує </a:t>
-            </a:r>
-            <a:r>
-              <a:rPr lang="uk-UA" dirty="0" err="1"/>
-              <a:t>аудіовідтворення</a:t>
-            </a:r>
-            <a:r>
-              <a:rPr lang="uk-UA" dirty="0"/>
-              <a:t>, текст твору, авторську публікацію та синхронізацію рядків в одному сценарії.</a:t>
-            </a:r>
-            <a:endParaRPr dirty="0">
-              <a:latin typeface="Economica" panose="020B0604020202020204" charset="0"/>
-            </a:endParaRPr>
+              <a:rPr lang="uk-UA"/>
+              <a:t>Актуальність роботи зумовлена потребою у надійному backend-рішенні для платформи аудіопоезії, де необхідно поєднати керування контентом, синхронізований текст, облік прослуховувань, сповіщення, платежі та адміністративну модерацію в єдиній серверній логіці.</a:t>
+            </a:r>
+            <a:endParaRPr/>
           </a:p>
         </p:txBody>
       </p:sp>
